--- a/public/retrieval-flashcard-sprint-template.pptx
+++ b/public/retrieval-flashcard-sprint-template.pptx
@@ -2,13 +2,13 @@
 <file path=ppt/presentation.xml><?xml version="1.0" encoding="utf-8"?>
 <p:presentation xmlns:p="http://schemas.openxmlformats.org/presentationml/2006/main">
   <p:sldMasterIdLst>
-    <p:sldMasterId xmlns:r="http://schemas.openxmlformats.org/officeDocument/2006/relationships" id="2147483648" r:id="R6be58fd0e9194b90"/>
+    <p:sldMasterId xmlns:r="http://schemas.openxmlformats.org/officeDocument/2006/relationships" id="2147483648" r:id="R244414f285cd4702"/>
   </p:sldMasterIdLst>
   <p:notesMasterIdLst>
-    <p:notesMasterId xmlns:r="http://schemas.openxmlformats.org/officeDocument/2006/relationships" r:id="R28bf9dc22f9843af"/>
+    <p:notesMasterId xmlns:r="http://schemas.openxmlformats.org/officeDocument/2006/relationships" r:id="R122b742ada96410a"/>
   </p:notesMasterIdLst>
   <p:sldIdLst>
-    <p:sldId xmlns:r="http://schemas.openxmlformats.org/officeDocument/2006/relationships" id="256" r:id="R3a4e29b4e1764da6"/>
+    <p:sldId xmlns:r="http://schemas.openxmlformats.org/officeDocument/2006/relationships" id="256" r:id="R8ccf7bf14f8e487d"/>
   </p:sldIdLst>
   <p:sldSz cx="12192000" cy="6858000"/>
   <p:notesSz cx="6858000" cy="9144000"/>
@@ -442,7 +442,7 @@
           <a:lstStyle xmlns:a="http://schemas.openxmlformats.org/drawingml/2006/main"/>
           <a:p xmlns:a="http://schemas.openxmlformats.org/drawingml/2006/main">
             <a:r>
-              <a:t>Teacher setup: Replace bracketed text before teaching. Every text box is editable. Duplicate the slide for checked answers or a second prompt. Keep prompt and answer sides separate when printing cards.</a:t>
+              <a:t>Teacher setup: Replace bracketed text before teaching. All text and shapes are editable. Duplicate the slide for answers or another prompt. For card activities, separate prompt and answer sides before printing.</a:t>
             </a:r>
           </a:p>
           <a:p xmlns:a="http://schemas.openxmlformats.org/drawingml/2006/main">
@@ -452,17 +452,12 @@
           </a:p>
           <a:p xmlns:a="http://schemas.openxmlformats.org/drawingml/2006/main">
             <a:r>
-              <a:t>Activity: Flashcard practice</a:t>
-            </a:r>
-          </a:p>
-          <a:p xmlns:a="http://schemas.openxmlformats.org/drawingml/2006/main">
-            <a:r>
               <a:t>Materials: Your own checked flashcards</a:t>
             </a:r>
           </a:p>
           <a:p xmlns:a="http://schemas.openxmlformats.org/drawingml/2006/main">
             <a:r>
-              <a:t>Suggested total time including feedback: 6 minutes.</a:t>
+              <a:t>Suggested time including feedback: 6 minutes.</a:t>
             </a:r>
           </a:p>
           <a:p xmlns:a="http://schemas.openxmlformats.org/drawingml/2006/main">
@@ -505,26 +500,6 @@
               <a:t>Adapt: Use paired checking, audio prompts or larger print.</a:t>
             </a:r>
           </a:p>
-          <a:p xmlns:a="http://schemas.openxmlformats.org/drawingml/2006/main">
-            <a:r>
-              <a:t>Credit: Pooja K. Agarwal — flashcard guidance</a:t>
-            </a:r>
-          </a:p>
-          <a:p xmlns:a="http://schemas.openxmlformats.org/drawingml/2006/main">
-            <a:r>
-              <a:t>Flashcards are a shared study method. Agarwal is credited for the linked retrieval guidance; the short classroom format is a TNT adaptation.</a:t>
-            </a:r>
-          </a:p>
-          <a:p xmlns:a="http://schemas.openxmlformats.org/drawingml/2006/main">
-            <a:r>
-              <a:t>Source: https://www.retrievalpractice.org/strategies/2019/11/18/flashcards</a:t>
-            </a:r>
-          </a:p>
-          <a:p xmlns:a="http://schemas.openxmlformats.org/drawingml/2006/main">
-            <a:r>
-              <a:t>Full guide: https://tnt-teaching-tools.github.io/cold-call-classroom/retrieval-flashcard-sprint.html</a:t>
-            </a:r>
-          </a:p>
         </p:txBody>
       </p:sp>
       <p:sp>
@@ -569,7 +544,7 @@
           <p:cNvPr id="4" name="Accent rule">
             <a:extLst xmlns:a="http://schemas.openxmlformats.org/drawingml/2006/main">
               <a:ext uri="{FF2B5EF4-FFF2-40B4-BE49-F238E27FC236}">
-                <a16:creationId xmlns:a16="http://schemas.microsoft.com/office/drawing/2014/main" id="{994C26D5-3C9B-4B28-9E6A-787B67F31545}"/>
+                <a16:creationId xmlns:a16="http://schemas.microsoft.com/office/drawing/2014/main" id="{7AC0D6A0-F0EA-4630-9961-BB198739128F}"/>
               </a:ext>
             </a:extLst>
           </p:cNvPr>
@@ -600,7 +575,7 @@
           <p:cNvPr id="2" name="Title">
             <a:extLst xmlns:a="http://schemas.openxmlformats.org/drawingml/2006/main">
               <a:ext uri="{FF2B5EF4-FFF2-40B4-BE49-F238E27FC236}">
-                <a16:creationId xmlns:a16="http://schemas.microsoft.com/office/drawing/2014/main" id="{F883FA0B-0329-4A86-BAAE-CE1B303B50A8}"/>
+                <a16:creationId xmlns:a16="http://schemas.microsoft.com/office/drawing/2014/main" id="{D0B50084-F03C-4451-88C0-43C3039D0C68}"/>
               </a:ext>
             </a:extLst>
           </p:cNvPr>
@@ -747,7 +722,7 @@
           <p:cNvPr id="3" name="Subtitle">
             <a:extLst xmlns:a="http://schemas.openxmlformats.org/drawingml/2006/main">
               <a:ext uri="{FF2B5EF4-FFF2-40B4-BE49-F238E27FC236}">
-                <a16:creationId xmlns:a16="http://schemas.microsoft.com/office/drawing/2014/main" id="{275066D6-5D81-4ADA-98B8-E50F3AB6BC09}"/>
+                <a16:creationId xmlns:a16="http://schemas.microsoft.com/office/drawing/2014/main" id="{4CDF72A5-AB9B-4799-8DD6-45C7EB478B1C}"/>
               </a:ext>
             </a:extLst>
           </p:cNvPr>
@@ -911,7 +886,7 @@
           <p:cNvPr id="3" name="Accent rule">
             <a:extLst xmlns:a="http://schemas.openxmlformats.org/drawingml/2006/main">
               <a:ext uri="{FF2B5EF4-FFF2-40B4-BE49-F238E27FC236}">
-                <a16:creationId xmlns:a16="http://schemas.microsoft.com/office/drawing/2014/main" id="{18E01FA4-E2E4-4544-AF43-A27E06145A7F}"/>
+                <a16:creationId xmlns:a16="http://schemas.microsoft.com/office/drawing/2014/main" id="{ECAEA365-3F68-46CB-86B1-DB20136E4A9A}"/>
               </a:ext>
             </a:extLst>
           </p:cNvPr>
@@ -942,7 +917,7 @@
           <p:cNvPr id="2" name="Section title">
             <a:extLst xmlns:a="http://schemas.openxmlformats.org/drawingml/2006/main">
               <a:ext uri="{FF2B5EF4-FFF2-40B4-BE49-F238E27FC236}">
-                <a16:creationId xmlns:a16="http://schemas.microsoft.com/office/drawing/2014/main" id="{9DD31854-68AD-4065-A9E2-A252F0586C70}"/>
+                <a16:creationId xmlns:a16="http://schemas.microsoft.com/office/drawing/2014/main" id="{7E2F9338-E10B-4597-ACC8-07E69730AF5B}"/>
               </a:ext>
             </a:extLst>
           </p:cNvPr>
@@ -1106,7 +1081,7 @@
           <p:cNvPr id="4" name="Accent rule">
             <a:extLst xmlns:a="http://schemas.openxmlformats.org/drawingml/2006/main">
               <a:ext uri="{FF2B5EF4-FFF2-40B4-BE49-F238E27FC236}">
-                <a16:creationId xmlns:a16="http://schemas.microsoft.com/office/drawing/2014/main" id="{31536B32-53BE-4090-8BFE-38AAD120C405}"/>
+                <a16:creationId xmlns:a16="http://schemas.microsoft.com/office/drawing/2014/main" id="{560E5688-A9CA-4E15-8C23-FD25291F1BB3}"/>
               </a:ext>
             </a:extLst>
           </p:cNvPr>
@@ -1137,7 +1112,7 @@
           <p:cNvPr id="2" name="Title">
             <a:extLst xmlns:a="http://schemas.openxmlformats.org/drawingml/2006/main">
               <a:ext uri="{FF2B5EF4-FFF2-40B4-BE49-F238E27FC236}">
-                <a16:creationId xmlns:a16="http://schemas.microsoft.com/office/drawing/2014/main" id="{E3BFD881-03D9-4B51-B0A7-CA2879DBB240}"/>
+                <a16:creationId xmlns:a16="http://schemas.microsoft.com/office/drawing/2014/main" id="{A4EA98E6-478F-4B6A-8806-0EF6229D0943}"/>
               </a:ext>
             </a:extLst>
           </p:cNvPr>
@@ -1284,7 +1259,7 @@
           <p:cNvPr id="3" name="Body">
             <a:extLst xmlns:a="http://schemas.openxmlformats.org/drawingml/2006/main">
               <a:ext uri="{FF2B5EF4-FFF2-40B4-BE49-F238E27FC236}">
-                <a16:creationId xmlns:a16="http://schemas.microsoft.com/office/drawing/2014/main" id="{C987DD86-49C2-4698-90D7-9FA9BE0F3270}"/>
+                <a16:creationId xmlns:a16="http://schemas.microsoft.com/office/drawing/2014/main" id="{CE72FF27-C438-485B-B880-91FB1C4764F1}"/>
               </a:ext>
             </a:extLst>
           </p:cNvPr>
@@ -1448,7 +1423,7 @@
           <p:cNvPr id="5" name="Accent rule">
             <a:extLst xmlns:a="http://schemas.openxmlformats.org/drawingml/2006/main">
               <a:ext uri="{FF2B5EF4-FFF2-40B4-BE49-F238E27FC236}">
-                <a16:creationId xmlns:a16="http://schemas.microsoft.com/office/drawing/2014/main" id="{2DB75996-5950-4284-8719-58CB03FE7FC1}"/>
+                <a16:creationId xmlns:a16="http://schemas.microsoft.com/office/drawing/2014/main" id="{4AF6D9CA-8B55-42B8-96D9-2540E5C12377}"/>
               </a:ext>
             </a:extLst>
           </p:cNvPr>
@@ -1479,7 +1454,7 @@
           <p:cNvPr id="2" name="Title">
             <a:extLst xmlns:a="http://schemas.openxmlformats.org/drawingml/2006/main">
               <a:ext uri="{FF2B5EF4-FFF2-40B4-BE49-F238E27FC236}">
-                <a16:creationId xmlns:a16="http://schemas.microsoft.com/office/drawing/2014/main" id="{E7ECB52E-0A37-4445-98DD-243E51D21AE3}"/>
+                <a16:creationId xmlns:a16="http://schemas.microsoft.com/office/drawing/2014/main" id="{AFCFEA5C-AF38-47E8-BF7C-9C527348E446}"/>
               </a:ext>
             </a:extLst>
           </p:cNvPr>
@@ -1626,7 +1601,7 @@
           <p:cNvPr id="3" name="Left column">
             <a:extLst xmlns:a="http://schemas.openxmlformats.org/drawingml/2006/main">
               <a:ext uri="{FF2B5EF4-FFF2-40B4-BE49-F238E27FC236}">
-                <a16:creationId xmlns:a16="http://schemas.microsoft.com/office/drawing/2014/main" id="{D98CF504-8CF2-493B-BA4D-244D269E4781}"/>
+                <a16:creationId xmlns:a16="http://schemas.microsoft.com/office/drawing/2014/main" id="{D2726DCD-370A-4269-9DB3-F3E10ECE8536}"/>
               </a:ext>
             </a:extLst>
           </p:cNvPr>
@@ -1773,7 +1748,7 @@
           <p:cNvPr id="4" name="Right column">
             <a:extLst xmlns:a="http://schemas.openxmlformats.org/drawingml/2006/main">
               <a:ext uri="{FF2B5EF4-FFF2-40B4-BE49-F238E27FC236}">
-                <a16:creationId xmlns:a16="http://schemas.microsoft.com/office/drawing/2014/main" id="{C4C7AFBA-2348-4CA8-BA67-342BBBE96A4D}"/>
+                <a16:creationId xmlns:a16="http://schemas.microsoft.com/office/drawing/2014/main" id="{F0454900-A408-4D05-B81C-E1479D782D51}"/>
               </a:ext>
             </a:extLst>
           </p:cNvPr>
@@ -1937,7 +1912,7 @@
           <p:cNvPr id="4" name="Accent rule">
             <a:extLst xmlns:a="http://schemas.openxmlformats.org/drawingml/2006/main">
               <a:ext uri="{FF2B5EF4-FFF2-40B4-BE49-F238E27FC236}">
-                <a16:creationId xmlns:a16="http://schemas.microsoft.com/office/drawing/2014/main" id="{AEB99967-58AA-408A-B8AC-A418D9C2BC2C}"/>
+                <a16:creationId xmlns:a16="http://schemas.microsoft.com/office/drawing/2014/main" id="{80A10B3B-3A37-4FAD-909C-4F6BAA42E53E}"/>
               </a:ext>
             </a:extLst>
           </p:cNvPr>
@@ -1968,7 +1943,7 @@
           <p:cNvPr id="2" name="Title">
             <a:extLst xmlns:a="http://schemas.openxmlformats.org/drawingml/2006/main">
               <a:ext uri="{FF2B5EF4-FFF2-40B4-BE49-F238E27FC236}">
-                <a16:creationId xmlns:a16="http://schemas.microsoft.com/office/drawing/2014/main" id="{90D76B56-9496-46B2-A5E6-8FF7E6E7A75F}"/>
+                <a16:creationId xmlns:a16="http://schemas.microsoft.com/office/drawing/2014/main" id="{D060AA7E-0338-450E-B62B-16111A506035}"/>
               </a:ext>
             </a:extLst>
           </p:cNvPr>
@@ -2115,7 +2090,7 @@
           <p:cNvPr id="3" name="Left column">
             <a:extLst xmlns:a="http://schemas.openxmlformats.org/drawingml/2006/main">
               <a:ext uri="{FF2B5EF4-FFF2-40B4-BE49-F238E27FC236}">
-                <a16:creationId xmlns:a16="http://schemas.microsoft.com/office/drawing/2014/main" id="{6F3F0CEB-2C72-42BB-A7D4-DE24087D6473}"/>
+                <a16:creationId xmlns:a16="http://schemas.microsoft.com/office/drawing/2014/main" id="{DD48B02E-4F46-4FDD-8F1F-8B623BCE8C63}"/>
               </a:ext>
             </a:extLst>
           </p:cNvPr>
@@ -2300,12 +2275,12 @@
   </p:cSld>
   <p:clrMap bg1="lt1" tx1="dk1" bg2="lt2" tx2="dk2" accent1="accent1" accent2="accent2" accent3="accent3" accent4="accent4" accent5="accent5" accent6="accent6" hlink="hlink" folHlink="folHlink"/>
   <p:sldLayoutIdLst>
-    <p:sldLayoutId xmlns:r="http://schemas.openxmlformats.org/officeDocument/2006/relationships" id="2147483649" r:id="R10f07527f6ac46c6"/>
-    <p:sldLayoutId xmlns:r="http://schemas.openxmlformats.org/officeDocument/2006/relationships" id="2147483650" r:id="R7822024c21db4706"/>
-    <p:sldLayoutId xmlns:r="http://schemas.openxmlformats.org/officeDocument/2006/relationships" id="2147483651" r:id="Re6f09c5a095240f4"/>
-    <p:sldLayoutId xmlns:r="http://schemas.openxmlformats.org/officeDocument/2006/relationships" id="2147483652" r:id="R047048f1424346f0"/>
-    <p:sldLayoutId xmlns:r="http://schemas.openxmlformats.org/officeDocument/2006/relationships" id="2147483653" r:id="R47302f2114034d46"/>
-    <p:sldLayoutId xmlns:r="http://schemas.openxmlformats.org/officeDocument/2006/relationships" id="2147483654" r:id="R49cdbd7b58134607"/>
+    <p:sldLayoutId xmlns:r="http://schemas.openxmlformats.org/officeDocument/2006/relationships" id="2147483649" r:id="R1a1ccd6257454cb7"/>
+    <p:sldLayoutId xmlns:r="http://schemas.openxmlformats.org/officeDocument/2006/relationships" id="2147483650" r:id="R754b991fb04b4284"/>
+    <p:sldLayoutId xmlns:r="http://schemas.openxmlformats.org/officeDocument/2006/relationships" id="2147483651" r:id="R56a25639b3c54aae"/>
+    <p:sldLayoutId xmlns:r="http://schemas.openxmlformats.org/officeDocument/2006/relationships" id="2147483652" r:id="R50108500fe7140df"/>
+    <p:sldLayoutId xmlns:r="http://schemas.openxmlformats.org/officeDocument/2006/relationships" id="2147483653" r:id="R23efea837dcc41fe"/>
+    <p:sldLayoutId xmlns:r="http://schemas.openxmlformats.org/officeDocument/2006/relationships" id="2147483654" r:id="Rff200f64fb1e4da6"/>
   </p:sldLayoutIdLst>
   <p:txStyles>
     <p:titleStyle>
@@ -2838,7 +2813,7 @@
     <p:bg>
       <p:bgPr>
         <a:solidFill xmlns:a="http://schemas.openxmlformats.org/drawingml/2006/main">
-          <a:srgbClr val="FFFCF2"/>
+          <a:srgbClr val="FFFDF5"/>
         </a:solidFill>
       </p:bgPr>
     </p:bg>
@@ -2853,10 +2828,10 @@
       </p:grpSpPr>
       <p:sp>
         <p:nvSpPr>
-          <p:cNvPr id="8" name="">
+          <p:cNvPr id="19" name="">
             <a:extLst xmlns:a="http://schemas.openxmlformats.org/drawingml/2006/main">
               <a:ext uri="{FF2B5EF4-FFF2-40B4-BE49-F238E27FC236}">
-                <a16:creationId xmlns:a16="http://schemas.microsoft.com/office/drawing/2014/main" id="{1F2A44F1-1736-476D-B2EC-AA3E7F0316A7}"/>
+                <a16:creationId xmlns:a16="http://schemas.microsoft.com/office/drawing/2014/main" id="{6D697281-7DCD-4CDD-B354-69340B9D9828}"/>
               </a:ext>
             </a:extLst>
           </p:cNvPr>
@@ -2867,8 +2842,8 @@
         </p:nvSpPr>
         <p:spPr>
           <a:xfrm xmlns:a="http://schemas.openxmlformats.org/drawingml/2006/main">
-            <a:off x="609600" y="333375"/>
-            <a:ext cx="10972800" cy="714375"/>
+            <a:off x="609600" y="323850"/>
+            <a:ext cx="10972800" cy="666750"/>
           </a:xfrm>
           <a:prstGeom xmlns:a="http://schemas.openxmlformats.org/drawingml/2006/main" prst="rect">
             <a:avLst/>
@@ -2885,23 +2860,23 @@
           <a:lstStyle xmlns:a="http://schemas.openxmlformats.org/drawingml/2006/main"/>
           <a:p xmlns:a="http://schemas.openxmlformats.org/drawingml/2006/main">
             <a:pPr>
-              <a:defRPr sz="4050" b="1">
+              <a:defRPr sz="3450" b="1">
                 <a:solidFill>
-                  <a:srgbClr val="242720"/>
+                  <a:srgbClr val="263C3A"/>
                 </a:solidFill>
-                <a:latin typeface="Arial"/>
-                <a:ea typeface="Arial"/>
-                <a:cs typeface="Arial"/>
+                <a:latin typeface="DejaVu Sans"/>
+                <a:ea typeface="DejaVu Sans"/>
+                <a:cs typeface="DejaVu Sans"/>
               </a:defRPr>
             </a:pPr>
             <a:r>
-              <a:rPr sz="4050" b="1">
+              <a:rPr sz="3450" b="1">
                 <a:solidFill>
-                  <a:srgbClr val="242720"/>
+                  <a:srgbClr val="263C3A"/>
                 </a:solidFill>
-                <a:latin typeface="Arial"/>
-                <a:ea typeface="Arial"/>
-                <a:cs typeface="Arial"/>
+                <a:latin typeface="DejaVu Sans"/>
+                <a:ea typeface="DejaVu Sans"/>
+                <a:cs typeface="DejaVu Sans"/>
               </a:rPr>
               <a:t>Flashcard practice</a:t>
             </a:r>
@@ -2913,7 +2888,7 @@
           <p:cNvPr id="2" name="">
             <a:extLst xmlns:a="http://schemas.openxmlformats.org/drawingml/2006/main">
               <a:ext uri="{FF2B5EF4-FFF2-40B4-BE49-F238E27FC236}">
-                <a16:creationId xmlns:a16="http://schemas.microsoft.com/office/drawing/2014/main" id="{315B8805-0E02-415C-AF0A-5F7CAF14FE42}"/>
+                <a16:creationId xmlns:a16="http://schemas.microsoft.com/office/drawing/2014/main" id="{131A12AE-6285-4F30-8C85-C6E2577FF580}"/>
               </a:ext>
             </a:extLst>
           </p:cNvPr>
@@ -2924,8 +2899,8 @@
         </p:nvSpPr>
         <p:spPr>
           <a:xfrm xmlns:a="http://schemas.openxmlformats.org/drawingml/2006/main">
-            <a:off x="609600" y="1190625"/>
-            <a:ext cx="10972800" cy="476250"/>
+            <a:off x="609600" y="1085850"/>
+            <a:ext cx="10972800" cy="409575"/>
           </a:xfrm>
           <a:prstGeom xmlns:a="http://schemas.openxmlformats.org/drawingml/2006/main" prst="rect">
             <a:avLst/>
@@ -2942,25 +2917,25 @@
           <a:lstStyle xmlns:a="http://schemas.openxmlformats.org/drawingml/2006/main"/>
           <a:p xmlns:a="http://schemas.openxmlformats.org/drawingml/2006/main">
             <a:pPr>
-              <a:defRPr sz="2400" b="0">
+              <a:defRPr sz="2175" b="0">
                 <a:solidFill>
-                  <a:srgbClr val="242720"/>
+                  <a:srgbClr val="687572"/>
                 </a:solidFill>
-                <a:latin typeface="Arial"/>
-                <a:ea typeface="Arial"/>
-                <a:cs typeface="Arial"/>
+                <a:latin typeface="DejaVu Sans"/>
+                <a:ea typeface="DejaVu Sans"/>
+                <a:cs typeface="DejaVu Sans"/>
               </a:defRPr>
             </a:pPr>
             <a:r>
-              <a:rPr sz="2400" b="0">
+              <a:rPr sz="2175" b="0">
                 <a:solidFill>
-                  <a:srgbClr val="242720"/>
+                  <a:srgbClr val="687572"/>
                 </a:solidFill>
-                <a:latin typeface="Arial"/>
-                <a:ea typeface="Arial"/>
-                <a:cs typeface="Arial"/>
+                <a:latin typeface="DejaVu Sans"/>
+                <a:ea typeface="DejaVu Sans"/>
+                <a:cs typeface="DejaVu Sans"/>
               </a:rPr>
-              <a:t>[Add your topic or retrieval focus]</a:t>
+              <a:t>[Your topic or retrieval focus]</a:t>
             </a:r>
           </a:p>
         </p:txBody>
@@ -2970,7 +2945,7 @@
           <p:cNvPr id="3" name="">
             <a:extLst xmlns:a="http://schemas.openxmlformats.org/drawingml/2006/main">
               <a:ext uri="{FF2B5EF4-FFF2-40B4-BE49-F238E27FC236}">
-                <a16:creationId xmlns:a16="http://schemas.microsoft.com/office/drawing/2014/main" id="{036A5CDE-580C-45E7-B145-131314AB06AC}"/>
+                <a16:creationId xmlns:a16="http://schemas.microsoft.com/office/drawing/2014/main" id="{519BC030-1875-4381-A5BC-D7F223D699A7}"/>
               </a:ext>
             </a:extLst>
           </p:cNvPr>
@@ -2981,8 +2956,38 @@
         </p:nvSpPr>
         <p:spPr>
           <a:xfrm xmlns:a="http://schemas.openxmlformats.org/drawingml/2006/main">
-            <a:off x="609600" y="1733550"/>
-            <a:ext cx="10972800" cy="400050"/>
+            <a:off x="609600" y="1676400"/>
+            <a:ext cx="10972800" cy="19050"/>
+          </a:xfrm>
+          <a:prstGeom xmlns:a="http://schemas.openxmlformats.org/drawingml/2006/main" prst="rect">
+            <a:avLst/>
+          </a:prstGeom>
+          <a:solidFill xmlns:a="http://schemas.openxmlformats.org/drawingml/2006/main">
+            <a:srgbClr val="A9BDB7"/>
+          </a:solidFill>
+          <a:ln xmlns:a="http://schemas.openxmlformats.org/drawingml/2006/main" w="0">
+            <a:noFill/>
+          </a:ln>
+        </p:spPr>
+      </p:sp>
+      <p:sp>
+        <p:nvSpPr>
+          <p:cNvPr id="4" name="">
+            <a:extLst xmlns:a="http://schemas.openxmlformats.org/drawingml/2006/main">
+              <a:ext uri="{FF2B5EF4-FFF2-40B4-BE49-F238E27FC236}">
+                <a16:creationId xmlns:a16="http://schemas.microsoft.com/office/drawing/2014/main" id="{7485DE93-2CF7-4354-864B-F8532386BBA6}"/>
+              </a:ext>
+            </a:extLst>
+          </p:cNvPr>
+          <p:cNvSpPr>
+            <a:spLocks xmlns:a="http://schemas.openxmlformats.org/drawingml/2006/main" noGrp="1"/>
+          </p:cNvSpPr>
+          <p:nvPr/>
+        </p:nvSpPr>
+        <p:spPr>
+          <a:xfrm xmlns:a="http://schemas.openxmlformats.org/drawingml/2006/main">
+            <a:off x="609600" y="1828800"/>
+            <a:ext cx="4476750" cy="304800"/>
           </a:xfrm>
           <a:prstGeom xmlns:a="http://schemas.openxmlformats.org/drawingml/2006/main" prst="rect">
             <a:avLst/>
@@ -2999,35 +3004,35 @@
           <a:lstStyle xmlns:a="http://schemas.openxmlformats.org/drawingml/2006/main"/>
           <a:p xmlns:a="http://schemas.openxmlformats.org/drawingml/2006/main">
             <a:pPr>
-              <a:defRPr sz="1800" b="0">
+              <a:defRPr sz="1575" b="1">
                 <a:solidFill>
-                  <a:srgbClr val="28534A"/>
+                  <a:srgbClr val="263C3A"/>
                 </a:solidFill>
-                <a:latin typeface="Arial"/>
-                <a:ea typeface="Arial"/>
-                <a:cs typeface="Arial"/>
+                <a:latin typeface="DejaVu Sans"/>
+                <a:ea typeface="DejaVu Sans"/>
+                <a:cs typeface="DejaVu Sans"/>
               </a:defRPr>
             </a:pPr>
             <a:r>
-              <a:rPr sz="1800" b="0">
+              <a:rPr sz="1575" b="1">
                 <a:solidFill>
-                  <a:srgbClr val="28534A"/>
+                  <a:srgbClr val="263C3A"/>
                 </a:solidFill>
-                <a:latin typeface="Arial"/>
-                <a:ea typeface="Arial"/>
-                <a:cs typeface="Arial"/>
+                <a:latin typeface="DejaVu Sans"/>
+                <a:ea typeface="DejaVu Sans"/>
+                <a:cs typeface="DejaVu Sans"/>
               </a:rPr>
-              <a:t>Recall independently first. Check and improve after feedback.</a:t>
+              <a:t>01  Recall from memory</a:t>
             </a:r>
           </a:p>
         </p:txBody>
       </p:sp>
       <p:sp>
         <p:nvSpPr>
-          <p:cNvPr id="4" name="">
+          <p:cNvPr id="5" name="">
             <a:extLst xmlns:a="http://schemas.openxmlformats.org/drawingml/2006/main">
               <a:ext uri="{FF2B5EF4-FFF2-40B4-BE49-F238E27FC236}">
-                <a16:creationId xmlns:a16="http://schemas.microsoft.com/office/drawing/2014/main" id="{8885E21D-0290-4961-B8AF-79C7E73FE169}"/>
+                <a16:creationId xmlns:a16="http://schemas.microsoft.com/office/drawing/2014/main" id="{71FDC75F-7692-4845-B8A2-704A8B87C8C6}"/>
               </a:ext>
             </a:extLst>
           </p:cNvPr>
@@ -3038,182 +3043,8 @@
         </p:nvSpPr>
         <p:spPr>
           <a:xfrm xmlns:a="http://schemas.openxmlformats.org/drawingml/2006/main">
-            <a:off x="609600" y="2190750"/>
-            <a:ext cx="5400675" cy="3333750"/>
-          </a:xfrm>
-          <a:prstGeom xmlns:a="http://schemas.openxmlformats.org/drawingml/2006/main" prst="rect">
-            <a:avLst/>
-          </a:prstGeom>
-          <a:noFill xmlns:a="http://schemas.openxmlformats.org/drawingml/2006/main"/>
-          <a:ln xmlns:a="http://schemas.openxmlformats.org/drawingml/2006/main" w="9525">
-            <a:solidFill>
-              <a:srgbClr val="CBD0C4"/>
-            </a:solidFill>
-          </a:ln>
-        </p:spPr>
-        <p:txBody>
-          <a:bodyPr xmlns:a="http://schemas.openxmlformats.org/drawingml/2006/main" lIns="142875" tIns="114300" rIns="142875" bIns="0" anchor="t">
-            <a:noAutofit/>
-          </a:bodyPr>
-          <a:lstStyle xmlns:a="http://schemas.openxmlformats.org/drawingml/2006/main"/>
-          <a:p xmlns:a="http://schemas.openxmlformats.org/drawingml/2006/main">
-            <a:pPr>
-              <a:defRPr sz="1950" b="0">
-                <a:solidFill>
-                  <a:srgbClr val="42473D"/>
-                </a:solidFill>
-                <a:latin typeface="Arial"/>
-                <a:ea typeface="Arial"/>
-                <a:cs typeface="Arial"/>
-              </a:defRPr>
-            </a:pPr>
-            <a:r>
-              <a:rPr sz="1950" b="0">
-                <a:solidFill>
-                  <a:srgbClr val="42473D"/>
-                </a:solidFill>
-                <a:latin typeface="Arial"/>
-                <a:ea typeface="Arial"/>
-                <a:cs typeface="Arial"/>
-              </a:rPr>
-              <a:t>[Prompt or card front]</a:t>
-            </a:r>
-          </a:p>
-          <a:p xmlns:a="http://schemas.openxmlformats.org/drawingml/2006/main">
-            <a:r>
-              <a:t/>
-            </a:r>
-          </a:p>
-          <a:p xmlns:a="http://schemas.openxmlformats.org/drawingml/2006/main">
-            <a:pPr>
-              <a:defRPr sz="1950" b="0">
-                <a:solidFill>
-                  <a:srgbClr val="42473D"/>
-                </a:solidFill>
-                <a:latin typeface="Arial"/>
-                <a:ea typeface="Arial"/>
-                <a:cs typeface="Arial"/>
-              </a:defRPr>
-            </a:pPr>
-            <a:r>
-              <a:rPr sz="1950" b="0">
-                <a:solidFill>
-                  <a:srgbClr val="42473D"/>
-                </a:solidFill>
-                <a:latin typeface="Arial"/>
-                <a:ea typeface="Arial"/>
-                <a:cs typeface="Arial"/>
-              </a:rPr>
-              <a:t>[Add your own prompt]</a:t>
-            </a:r>
-          </a:p>
-        </p:txBody>
-      </p:sp>
-      <p:sp>
-        <p:nvSpPr>
-          <p:cNvPr id="5" name="">
-            <a:extLst xmlns:a="http://schemas.openxmlformats.org/drawingml/2006/main">
-              <a:ext uri="{FF2B5EF4-FFF2-40B4-BE49-F238E27FC236}">
-                <a16:creationId xmlns:a16="http://schemas.microsoft.com/office/drawing/2014/main" id="{138FCDCF-844E-4DD8-B9D0-C2CD22869CD7}"/>
-              </a:ext>
-            </a:extLst>
-          </p:cNvPr>
-          <p:cNvSpPr>
-            <a:spLocks xmlns:a="http://schemas.openxmlformats.org/drawingml/2006/main" noGrp="1"/>
-          </p:cNvSpPr>
-          <p:nvPr/>
-        </p:nvSpPr>
-        <p:spPr>
-          <a:xfrm xmlns:a="http://schemas.openxmlformats.org/drawingml/2006/main">
-            <a:off x="6181725" y="2190750"/>
-            <a:ext cx="5400675" cy="3333750"/>
-          </a:xfrm>
-          <a:prstGeom xmlns:a="http://schemas.openxmlformats.org/drawingml/2006/main" prst="rect">
-            <a:avLst/>
-          </a:prstGeom>
-          <a:noFill xmlns:a="http://schemas.openxmlformats.org/drawingml/2006/main"/>
-          <a:ln xmlns:a="http://schemas.openxmlformats.org/drawingml/2006/main" w="9525">
-            <a:solidFill>
-              <a:srgbClr val="CBD0C4"/>
-            </a:solidFill>
-          </a:ln>
-        </p:spPr>
-        <p:txBody>
-          <a:bodyPr xmlns:a="http://schemas.openxmlformats.org/drawingml/2006/main" lIns="142875" tIns="114300" rIns="142875" bIns="0" anchor="t">
-            <a:noAutofit/>
-          </a:bodyPr>
-          <a:lstStyle xmlns:a="http://schemas.openxmlformats.org/drawingml/2006/main"/>
-          <a:p xmlns:a="http://schemas.openxmlformats.org/drawingml/2006/main">
-            <a:pPr>
-              <a:defRPr sz="1950" b="0">
-                <a:solidFill>
-                  <a:srgbClr val="42473D"/>
-                </a:solidFill>
-                <a:latin typeface="Arial"/>
-                <a:ea typeface="Arial"/>
-                <a:cs typeface="Arial"/>
-              </a:defRPr>
-            </a:pPr>
-            <a:r>
-              <a:rPr sz="1950" b="0">
-                <a:solidFill>
-                  <a:srgbClr val="42473D"/>
-                </a:solidFill>
-                <a:latin typeface="Arial"/>
-                <a:ea typeface="Arial"/>
-                <a:cs typeface="Arial"/>
-              </a:rPr>
-              <a:t>[Checked answer or card back]</a:t>
-            </a:r>
-          </a:p>
-          <a:p xmlns:a="http://schemas.openxmlformats.org/drawingml/2006/main">
-            <a:r>
-              <a:t/>
-            </a:r>
-          </a:p>
-          <a:p xmlns:a="http://schemas.openxmlformats.org/drawingml/2006/main">
-            <a:pPr>
-              <a:defRPr sz="1950" b="0">
-                <a:solidFill>
-                  <a:srgbClr val="42473D"/>
-                </a:solidFill>
-                <a:latin typeface="Arial"/>
-                <a:ea typeface="Arial"/>
-                <a:cs typeface="Arial"/>
-              </a:defRPr>
-            </a:pPr>
-            <a:r>
-              <a:rPr sz="1950" b="0">
-                <a:solidFill>
-                  <a:srgbClr val="42473D"/>
-                </a:solidFill>
-                <a:latin typeface="Arial"/>
-                <a:ea typeface="Arial"/>
-                <a:cs typeface="Arial"/>
-              </a:rPr>
-              <a:t>[Add the answer and explanation]</a:t>
-            </a:r>
-          </a:p>
-        </p:txBody>
-      </p:sp>
-      <p:sp>
-        <p:nvSpPr>
-          <p:cNvPr id="6" name="">
-            <a:extLst xmlns:a="http://schemas.openxmlformats.org/drawingml/2006/main">
-              <a:ext uri="{FF2B5EF4-FFF2-40B4-BE49-F238E27FC236}">
-                <a16:creationId xmlns:a16="http://schemas.microsoft.com/office/drawing/2014/main" id="{AD209213-915E-4ABF-82E8-71711269EBD7}"/>
-              </a:ext>
-            </a:extLst>
-          </p:cNvPr>
-          <p:cNvSpPr>
-            <a:spLocks xmlns:a="http://schemas.openxmlformats.org/drawingml/2006/main" noGrp="1"/>
-          </p:cNvSpPr>
-          <p:nvPr/>
-        </p:nvSpPr>
-        <p:spPr>
-          <a:xfrm xmlns:a="http://schemas.openxmlformats.org/drawingml/2006/main">
-            <a:off x="609600" y="5953125"/>
-            <a:ext cx="10972800" cy="381000"/>
+            <a:off x="6286500" y="1828800"/>
+            <a:ext cx="5048250" cy="304800"/>
           </a:xfrm>
           <a:prstGeom xmlns:a="http://schemas.openxmlformats.org/drawingml/2006/main" prst="rect">
             <a:avLst/>
@@ -3230,35 +3061,35 @@
           <a:lstStyle xmlns:a="http://schemas.openxmlformats.org/drawingml/2006/main"/>
           <a:p xmlns:a="http://schemas.openxmlformats.org/drawingml/2006/main">
             <a:pPr>
-              <a:defRPr sz="1800" b="0">
+              <a:defRPr sz="1575" b="1">
                 <a:solidFill>
-                  <a:srgbClr val="28534A"/>
+                  <a:srgbClr val="263C3A"/>
                 </a:solidFill>
-                <a:latin typeface="Arial"/>
-                <a:ea typeface="Arial"/>
-                <a:cs typeface="Arial"/>
+                <a:latin typeface="DejaVu Sans"/>
+                <a:ea typeface="DejaVu Sans"/>
+                <a:cs typeface="DejaVu Sans"/>
               </a:defRPr>
             </a:pPr>
             <a:r>
-              <a:rPr sz="1800" b="0">
+              <a:rPr sz="1575" b="1">
                 <a:solidFill>
-                  <a:srgbClr val="28534A"/>
+                  <a:srgbClr val="263C3A"/>
                 </a:solidFill>
-                <a:latin typeface="Arial"/>
-                <a:ea typeface="Arial"/>
-                <a:cs typeface="Arial"/>
+                <a:latin typeface="DejaVu Sans"/>
+                <a:ea typeface="DejaVu Sans"/>
+                <a:cs typeface="DejaVu Sans"/>
               </a:rPr>
-              <a:t>Time: [Add minutes]     Check: [Add your feedback routine]</a:t>
+              <a:t>02  Check and improve</a:t>
             </a:r>
           </a:p>
         </p:txBody>
       </p:sp>
       <p:sp>
         <p:nvSpPr>
-          <p:cNvPr id="7" name="">
+          <p:cNvPr id="6" name="">
             <a:extLst xmlns:a="http://schemas.openxmlformats.org/drawingml/2006/main">
               <a:ext uri="{FF2B5EF4-FFF2-40B4-BE49-F238E27FC236}">
-                <a16:creationId xmlns:a16="http://schemas.microsoft.com/office/drawing/2014/main" id="{5A45F47A-BCB0-40F4-B25C-B297FD55A1E2}"/>
+                <a16:creationId xmlns:a16="http://schemas.microsoft.com/office/drawing/2014/main" id="{BCF4A28F-1763-4FC5-8371-BD86BF4CB9C5}"/>
               </a:ext>
             </a:extLst>
           </p:cNvPr>
@@ -3269,8 +3100,70 @@
         </p:nvSpPr>
         <p:spPr>
           <a:xfrm xmlns:a="http://schemas.openxmlformats.org/drawingml/2006/main">
-            <a:off x="609600" y="6534150"/>
-            <a:ext cx="10972800" cy="209550"/>
+            <a:off x="609600" y="2247900"/>
+            <a:ext cx="5400675" cy="3371850"/>
+          </a:xfrm>
+          <a:prstGeom xmlns:a="http://schemas.openxmlformats.org/drawingml/2006/main" prst="rect">
+            <a:avLst/>
+          </a:prstGeom>
+          <a:solidFill xmlns:a="http://schemas.openxmlformats.org/drawingml/2006/main">
+            <a:srgbClr val="EDF2F5"/>
+          </a:solidFill>
+          <a:ln xmlns:a="http://schemas.openxmlformats.org/drawingml/2006/main" w="9525">
+            <a:solidFill>
+              <a:srgbClr val="D4DFDB"/>
+            </a:solidFill>
+          </a:ln>
+        </p:spPr>
+      </p:sp>
+      <p:sp>
+        <p:nvSpPr>
+          <p:cNvPr id="7" name="">
+            <a:extLst xmlns:a="http://schemas.openxmlformats.org/drawingml/2006/main">
+              <a:ext uri="{FF2B5EF4-FFF2-40B4-BE49-F238E27FC236}">
+                <a16:creationId xmlns:a16="http://schemas.microsoft.com/office/drawing/2014/main" id="{D7CE56DA-5894-4476-8569-8A9875D74FC5}"/>
+              </a:ext>
+            </a:extLst>
+          </p:cNvPr>
+          <p:cNvSpPr>
+            <a:spLocks xmlns:a="http://schemas.openxmlformats.org/drawingml/2006/main" noGrp="1"/>
+          </p:cNvSpPr>
+          <p:nvPr/>
+        </p:nvSpPr>
+        <p:spPr>
+          <a:xfrm xmlns:a="http://schemas.openxmlformats.org/drawingml/2006/main">
+            <a:off x="800100" y="2419350"/>
+            <a:ext cx="381000" cy="381000"/>
+          </a:xfrm>
+          <a:prstGeom xmlns:a="http://schemas.openxmlformats.org/drawingml/2006/main" prst="ellipse">
+            <a:avLst/>
+          </a:prstGeom>
+          <a:solidFill xmlns:a="http://schemas.openxmlformats.org/drawingml/2006/main">
+            <a:srgbClr val="FFFFFF"/>
+          </a:solidFill>
+          <a:ln xmlns:a="http://schemas.openxmlformats.org/drawingml/2006/main" w="0">
+            <a:noFill/>
+          </a:ln>
+        </p:spPr>
+      </p:sp>
+      <p:sp>
+        <p:nvSpPr>
+          <p:cNvPr id="8" name="">
+            <a:extLst xmlns:a="http://schemas.openxmlformats.org/drawingml/2006/main">
+              <a:ext uri="{FF2B5EF4-FFF2-40B4-BE49-F238E27FC236}">
+                <a16:creationId xmlns:a16="http://schemas.microsoft.com/office/drawing/2014/main" id="{3594F310-962B-4C25-A11E-D0207D4A99A0}"/>
+              </a:ext>
+            </a:extLst>
+          </p:cNvPr>
+          <p:cNvSpPr>
+            <a:spLocks xmlns:a="http://schemas.openxmlformats.org/drawingml/2006/main" noGrp="1"/>
+          </p:cNvSpPr>
+          <p:nvPr/>
+        </p:nvSpPr>
+        <p:spPr>
+          <a:xfrm xmlns:a="http://schemas.openxmlformats.org/drawingml/2006/main">
+            <a:off x="857250" y="2486025"/>
+            <a:ext cx="342900" cy="285750"/>
           </a:xfrm>
           <a:prstGeom xmlns:a="http://schemas.openxmlformats.org/drawingml/2006/main" prst="rect">
             <a:avLst/>
@@ -3287,33 +3180,524 @@
           <a:lstStyle xmlns:a="http://schemas.openxmlformats.org/drawingml/2006/main"/>
           <a:p xmlns:a="http://schemas.openxmlformats.org/drawingml/2006/main">
             <a:pPr>
-              <a:defRPr sz="1050" b="0">
+              <a:defRPr sz="1350" b="1">
                 <a:solidFill>
-                  <a:srgbClr val="62675C"/>
+                  <a:srgbClr val="263C3A"/>
                 </a:solidFill>
-                <a:latin typeface="Arial"/>
-                <a:ea typeface="Arial"/>
-                <a:cs typeface="Arial"/>
+                <a:latin typeface="DejaVu Sans"/>
+                <a:ea typeface="DejaVu Sans"/>
+                <a:cs typeface="DejaVu Sans"/>
               </a:defRPr>
             </a:pPr>
             <a:r>
-              <a:rPr sz="1050" b="0">
+              <a:rPr sz="1350" b="1">
                 <a:solidFill>
-                  <a:srgbClr val="62675C"/>
+                  <a:srgbClr val="263C3A"/>
                 </a:solidFill>
-                <a:latin typeface="Arial"/>
-                <a:ea typeface="Arial"/>
-                <a:cs typeface="Arial"/>
+                <a:latin typeface="DejaVu Sans"/>
+                <a:ea typeface="DejaVu Sans"/>
+                <a:cs typeface="DejaVu Sans"/>
               </a:rPr>
-              <a:t>TNT Teaching Tools   Editable classroom template   Source and teacher guidance in speaker notes</a:t>
+              <a:t>01</a:t>
             </a:r>
           </a:p>
         </p:txBody>
       </p:sp>
+      <p:sp>
+        <p:nvSpPr>
+          <p:cNvPr id="9" name="">
+            <a:extLst xmlns:a="http://schemas.openxmlformats.org/drawingml/2006/main">
+              <a:ext uri="{FF2B5EF4-FFF2-40B4-BE49-F238E27FC236}">
+                <a16:creationId xmlns:a16="http://schemas.microsoft.com/office/drawing/2014/main" id="{2BA0762C-1D32-46FB-A2CC-B24B7B068A87}"/>
+              </a:ext>
+            </a:extLst>
+          </p:cNvPr>
+          <p:cNvSpPr>
+            <a:spLocks xmlns:a="http://schemas.openxmlformats.org/drawingml/2006/main" noGrp="1"/>
+          </p:cNvSpPr>
+          <p:nvPr/>
+        </p:nvSpPr>
+        <p:spPr>
+          <a:xfrm xmlns:a="http://schemas.openxmlformats.org/drawingml/2006/main">
+            <a:off x="1352550" y="2466975"/>
+            <a:ext cx="4467225" cy="428625"/>
+          </a:xfrm>
+          <a:prstGeom xmlns:a="http://schemas.openxmlformats.org/drawingml/2006/main" prst="rect">
+            <a:avLst/>
+          </a:prstGeom>
+          <a:noFill xmlns:a="http://schemas.openxmlformats.org/drawingml/2006/main"/>
+          <a:ln xmlns:a="http://schemas.openxmlformats.org/drawingml/2006/main" w="0">
+            <a:noFill/>
+          </a:ln>
+        </p:spPr>
+        <p:txBody>
+          <a:bodyPr xmlns:a="http://schemas.openxmlformats.org/drawingml/2006/main" lIns="0" tIns="0" rIns="0" bIns="0" anchor="t">
+            <a:noAutofit/>
+          </a:bodyPr>
+          <a:lstStyle xmlns:a="http://schemas.openxmlformats.org/drawingml/2006/main"/>
+          <a:p xmlns:a="http://schemas.openxmlformats.org/drawingml/2006/main">
+            <a:pPr>
+              <a:defRPr sz="1725" b="1">
+                <a:solidFill>
+                  <a:srgbClr val="263C3A"/>
+                </a:solidFill>
+                <a:latin typeface="DejaVu Sans"/>
+                <a:ea typeface="DejaVu Sans"/>
+                <a:cs typeface="DejaVu Sans"/>
+              </a:defRPr>
+            </a:pPr>
+            <a:r>
+              <a:rPr sz="1725" b="1">
+                <a:solidFill>
+                  <a:srgbClr val="263C3A"/>
+                </a:solidFill>
+                <a:latin typeface="DejaVu Sans"/>
+                <a:ea typeface="DejaVu Sans"/>
+                <a:cs typeface="DejaVu Sans"/>
+              </a:rPr>
+              <a:t>Prompt side</a:t>
+            </a:r>
+          </a:p>
+        </p:txBody>
+      </p:sp>
+      <p:sp>
+        <p:nvSpPr>
+          <p:cNvPr id="10" name="">
+            <a:extLst xmlns:a="http://schemas.openxmlformats.org/drawingml/2006/main">
+              <a:ext uri="{FF2B5EF4-FFF2-40B4-BE49-F238E27FC236}">
+                <a16:creationId xmlns:a16="http://schemas.microsoft.com/office/drawing/2014/main" id="{757F05A0-29CB-438A-9D1A-12F414F18BAC}"/>
+              </a:ext>
+            </a:extLst>
+          </p:cNvPr>
+          <p:cNvSpPr>
+            <a:spLocks xmlns:a="http://schemas.openxmlformats.org/drawingml/2006/main" noGrp="1"/>
+          </p:cNvSpPr>
+          <p:nvPr/>
+        </p:nvSpPr>
+        <p:spPr>
+          <a:xfrm xmlns:a="http://schemas.openxmlformats.org/drawingml/2006/main">
+            <a:off x="819150" y="2990850"/>
+            <a:ext cx="4981575" cy="2466975"/>
+          </a:xfrm>
+          <a:prstGeom xmlns:a="http://schemas.openxmlformats.org/drawingml/2006/main" prst="rect">
+            <a:avLst/>
+          </a:prstGeom>
+          <a:noFill xmlns:a="http://schemas.openxmlformats.org/drawingml/2006/main"/>
+          <a:ln xmlns:a="http://schemas.openxmlformats.org/drawingml/2006/main" w="0">
+            <a:noFill/>
+          </a:ln>
+        </p:spPr>
+        <p:txBody>
+          <a:bodyPr xmlns:a="http://schemas.openxmlformats.org/drawingml/2006/main" lIns="0" tIns="0" rIns="0" bIns="0" anchor="t">
+            <a:noAutofit/>
+          </a:bodyPr>
+          <a:lstStyle xmlns:a="http://schemas.openxmlformats.org/drawingml/2006/main"/>
+          <a:p xmlns:a="http://schemas.openxmlformats.org/drawingml/2006/main">
+            <a:pPr>
+              <a:defRPr sz="1950" b="0">
+                <a:solidFill>
+                  <a:srgbClr val="687572"/>
+                </a:solidFill>
+                <a:latin typeface="DejaVu Sans"/>
+                <a:ea typeface="DejaVu Sans"/>
+                <a:cs typeface="DejaVu Sans"/>
+              </a:defRPr>
+            </a:pPr>
+            <a:r>
+              <a:rPr sz="1950" b="0">
+                <a:solidFill>
+                  <a:srgbClr val="687572"/>
+                </a:solidFill>
+                <a:latin typeface="DejaVu Sans"/>
+                <a:ea typeface="DejaVu Sans"/>
+                <a:cs typeface="DejaVu Sans"/>
+              </a:rPr>
+              <a:t>[Your prompt]</a:t>
+            </a:r>
+          </a:p>
+        </p:txBody>
+      </p:sp>
+      <p:sp>
+        <p:nvSpPr>
+          <p:cNvPr id="11" name="">
+            <a:extLst xmlns:a="http://schemas.openxmlformats.org/drawingml/2006/main">
+              <a:ext uri="{FF2B5EF4-FFF2-40B4-BE49-F238E27FC236}">
+                <a16:creationId xmlns:a16="http://schemas.microsoft.com/office/drawing/2014/main" id="{CC5CDF1F-636C-4F6F-B7A4-5A37B4970F45}"/>
+              </a:ext>
+            </a:extLst>
+          </p:cNvPr>
+          <p:cNvSpPr>
+            <a:spLocks xmlns:a="http://schemas.openxmlformats.org/drawingml/2006/main" noGrp="1"/>
+          </p:cNvSpPr>
+          <p:nvPr/>
+        </p:nvSpPr>
+        <p:spPr>
+          <a:xfrm xmlns:a="http://schemas.openxmlformats.org/drawingml/2006/main">
+            <a:off x="6181725" y="2247900"/>
+            <a:ext cx="5400675" cy="3371850"/>
+          </a:xfrm>
+          <a:prstGeom xmlns:a="http://schemas.openxmlformats.org/drawingml/2006/main" prst="rect">
+            <a:avLst/>
+          </a:prstGeom>
+          <a:solidFill xmlns:a="http://schemas.openxmlformats.org/drawingml/2006/main">
+            <a:srgbClr val="EAF1EC"/>
+          </a:solidFill>
+          <a:ln xmlns:a="http://schemas.openxmlformats.org/drawingml/2006/main" w="9525">
+            <a:solidFill>
+              <a:srgbClr val="D4DFDB"/>
+            </a:solidFill>
+          </a:ln>
+        </p:spPr>
+      </p:sp>
+      <p:sp>
+        <p:nvSpPr>
+          <p:cNvPr id="12" name="">
+            <a:extLst xmlns:a="http://schemas.openxmlformats.org/drawingml/2006/main">
+              <a:ext uri="{FF2B5EF4-FFF2-40B4-BE49-F238E27FC236}">
+                <a16:creationId xmlns:a16="http://schemas.microsoft.com/office/drawing/2014/main" id="{3AEF10EE-75AD-4417-8DFD-32720B14D035}"/>
+              </a:ext>
+            </a:extLst>
+          </p:cNvPr>
+          <p:cNvSpPr>
+            <a:spLocks xmlns:a="http://schemas.openxmlformats.org/drawingml/2006/main" noGrp="1"/>
+          </p:cNvSpPr>
+          <p:nvPr/>
+        </p:nvSpPr>
+        <p:spPr>
+          <a:xfrm xmlns:a="http://schemas.openxmlformats.org/drawingml/2006/main">
+            <a:off x="6372225" y="2419350"/>
+            <a:ext cx="381000" cy="381000"/>
+          </a:xfrm>
+          <a:prstGeom xmlns:a="http://schemas.openxmlformats.org/drawingml/2006/main" prst="ellipse">
+            <a:avLst/>
+          </a:prstGeom>
+          <a:solidFill xmlns:a="http://schemas.openxmlformats.org/drawingml/2006/main">
+            <a:srgbClr val="FFFFFF"/>
+          </a:solidFill>
+          <a:ln xmlns:a="http://schemas.openxmlformats.org/drawingml/2006/main" w="0">
+            <a:noFill/>
+          </a:ln>
+        </p:spPr>
+      </p:sp>
+      <p:sp>
+        <p:nvSpPr>
+          <p:cNvPr id="13" name="">
+            <a:extLst xmlns:a="http://schemas.openxmlformats.org/drawingml/2006/main">
+              <a:ext uri="{FF2B5EF4-FFF2-40B4-BE49-F238E27FC236}">
+                <a16:creationId xmlns:a16="http://schemas.microsoft.com/office/drawing/2014/main" id="{E5A17475-8B72-4391-84F7-9A0E1CD02948}"/>
+              </a:ext>
+            </a:extLst>
+          </p:cNvPr>
+          <p:cNvSpPr>
+            <a:spLocks xmlns:a="http://schemas.openxmlformats.org/drawingml/2006/main" noGrp="1"/>
+          </p:cNvSpPr>
+          <p:nvPr/>
+        </p:nvSpPr>
+        <p:spPr>
+          <a:xfrm xmlns:a="http://schemas.openxmlformats.org/drawingml/2006/main">
+            <a:off x="6429375" y="2486025"/>
+            <a:ext cx="342900" cy="285750"/>
+          </a:xfrm>
+          <a:prstGeom xmlns:a="http://schemas.openxmlformats.org/drawingml/2006/main" prst="rect">
+            <a:avLst/>
+          </a:prstGeom>
+          <a:noFill xmlns:a="http://schemas.openxmlformats.org/drawingml/2006/main"/>
+          <a:ln xmlns:a="http://schemas.openxmlformats.org/drawingml/2006/main" w="0">
+            <a:noFill/>
+          </a:ln>
+        </p:spPr>
+        <p:txBody>
+          <a:bodyPr xmlns:a="http://schemas.openxmlformats.org/drawingml/2006/main" lIns="0" tIns="0" rIns="0" bIns="0" anchor="t">
+            <a:noAutofit/>
+          </a:bodyPr>
+          <a:lstStyle xmlns:a="http://schemas.openxmlformats.org/drawingml/2006/main"/>
+          <a:p xmlns:a="http://schemas.openxmlformats.org/drawingml/2006/main">
+            <a:pPr>
+              <a:defRPr sz="1350" b="1">
+                <a:solidFill>
+                  <a:srgbClr val="263C3A"/>
+                </a:solidFill>
+                <a:latin typeface="DejaVu Sans"/>
+                <a:ea typeface="DejaVu Sans"/>
+                <a:cs typeface="DejaVu Sans"/>
+              </a:defRPr>
+            </a:pPr>
+            <a:r>
+              <a:rPr sz="1350" b="1">
+                <a:solidFill>
+                  <a:srgbClr val="263C3A"/>
+                </a:solidFill>
+                <a:latin typeface="DejaVu Sans"/>
+                <a:ea typeface="DejaVu Sans"/>
+                <a:cs typeface="DejaVu Sans"/>
+              </a:rPr>
+              <a:t>02</a:t>
+            </a:r>
+          </a:p>
+        </p:txBody>
+      </p:sp>
+      <p:sp>
+        <p:nvSpPr>
+          <p:cNvPr id="14" name="">
+            <a:extLst xmlns:a="http://schemas.openxmlformats.org/drawingml/2006/main">
+              <a:ext uri="{FF2B5EF4-FFF2-40B4-BE49-F238E27FC236}">
+                <a16:creationId xmlns:a16="http://schemas.microsoft.com/office/drawing/2014/main" id="{AC6D6D0A-CCCA-49F9-B127-30512592CC40}"/>
+              </a:ext>
+            </a:extLst>
+          </p:cNvPr>
+          <p:cNvSpPr>
+            <a:spLocks xmlns:a="http://schemas.openxmlformats.org/drawingml/2006/main" noGrp="1"/>
+          </p:cNvSpPr>
+          <p:nvPr/>
+        </p:nvSpPr>
+        <p:spPr>
+          <a:xfrm xmlns:a="http://schemas.openxmlformats.org/drawingml/2006/main">
+            <a:off x="6924675" y="2466975"/>
+            <a:ext cx="4467225" cy="428625"/>
+          </a:xfrm>
+          <a:prstGeom xmlns:a="http://schemas.openxmlformats.org/drawingml/2006/main" prst="rect">
+            <a:avLst/>
+          </a:prstGeom>
+          <a:noFill xmlns:a="http://schemas.openxmlformats.org/drawingml/2006/main"/>
+          <a:ln xmlns:a="http://schemas.openxmlformats.org/drawingml/2006/main" w="0">
+            <a:noFill/>
+          </a:ln>
+        </p:spPr>
+        <p:txBody>
+          <a:bodyPr xmlns:a="http://schemas.openxmlformats.org/drawingml/2006/main" lIns="0" tIns="0" rIns="0" bIns="0" anchor="t">
+            <a:noAutofit/>
+          </a:bodyPr>
+          <a:lstStyle xmlns:a="http://schemas.openxmlformats.org/drawingml/2006/main"/>
+          <a:p xmlns:a="http://schemas.openxmlformats.org/drawingml/2006/main">
+            <a:pPr>
+              <a:defRPr sz="1725" b="1">
+                <a:solidFill>
+                  <a:srgbClr val="263C3A"/>
+                </a:solidFill>
+                <a:latin typeface="DejaVu Sans"/>
+                <a:ea typeface="DejaVu Sans"/>
+                <a:cs typeface="DejaVu Sans"/>
+              </a:defRPr>
+            </a:pPr>
+            <a:r>
+              <a:rPr sz="1725" b="1">
+                <a:solidFill>
+                  <a:srgbClr val="263C3A"/>
+                </a:solidFill>
+                <a:latin typeface="DejaVu Sans"/>
+                <a:ea typeface="DejaVu Sans"/>
+                <a:cs typeface="DejaVu Sans"/>
+              </a:rPr>
+              <a:t>Answer side</a:t>
+            </a:r>
+          </a:p>
+        </p:txBody>
+      </p:sp>
+      <p:sp>
+        <p:nvSpPr>
+          <p:cNvPr id="15" name="">
+            <a:extLst xmlns:a="http://schemas.openxmlformats.org/drawingml/2006/main">
+              <a:ext uri="{FF2B5EF4-FFF2-40B4-BE49-F238E27FC236}">
+                <a16:creationId xmlns:a16="http://schemas.microsoft.com/office/drawing/2014/main" id="{517E4952-C20C-457D-85D6-4FBD364E769F}"/>
+              </a:ext>
+            </a:extLst>
+          </p:cNvPr>
+          <p:cNvSpPr>
+            <a:spLocks xmlns:a="http://schemas.openxmlformats.org/drawingml/2006/main" noGrp="1"/>
+          </p:cNvSpPr>
+          <p:nvPr/>
+        </p:nvSpPr>
+        <p:spPr>
+          <a:xfrm xmlns:a="http://schemas.openxmlformats.org/drawingml/2006/main">
+            <a:off x="6391275" y="2990850"/>
+            <a:ext cx="4981575" cy="2466975"/>
+          </a:xfrm>
+          <a:prstGeom xmlns:a="http://schemas.openxmlformats.org/drawingml/2006/main" prst="rect">
+            <a:avLst/>
+          </a:prstGeom>
+          <a:noFill xmlns:a="http://schemas.openxmlformats.org/drawingml/2006/main"/>
+          <a:ln xmlns:a="http://schemas.openxmlformats.org/drawingml/2006/main" w="0">
+            <a:noFill/>
+          </a:ln>
+        </p:spPr>
+        <p:txBody>
+          <a:bodyPr xmlns:a="http://schemas.openxmlformats.org/drawingml/2006/main" lIns="0" tIns="0" rIns="0" bIns="0" anchor="t">
+            <a:noAutofit/>
+          </a:bodyPr>
+          <a:lstStyle xmlns:a="http://schemas.openxmlformats.org/drawingml/2006/main"/>
+          <a:p xmlns:a="http://schemas.openxmlformats.org/drawingml/2006/main">
+            <a:pPr>
+              <a:defRPr sz="1950" b="0">
+                <a:solidFill>
+                  <a:srgbClr val="687572"/>
+                </a:solidFill>
+                <a:latin typeface="DejaVu Sans"/>
+                <a:ea typeface="DejaVu Sans"/>
+                <a:cs typeface="DejaVu Sans"/>
+              </a:defRPr>
+            </a:pPr>
+            <a:r>
+              <a:rPr sz="1950" b="0">
+                <a:solidFill>
+                  <a:srgbClr val="687572"/>
+                </a:solidFill>
+                <a:latin typeface="DejaVu Sans"/>
+                <a:ea typeface="DejaVu Sans"/>
+                <a:cs typeface="DejaVu Sans"/>
+              </a:rPr>
+              <a:t>[Your checked answer]</a:t>
+            </a:r>
+          </a:p>
+        </p:txBody>
+      </p:sp>
+      <p:sp>
+        <p:nvSpPr>
+          <p:cNvPr id="16" name="">
+            <a:extLst xmlns:a="http://schemas.openxmlformats.org/drawingml/2006/main">
+              <a:ext uri="{FF2B5EF4-FFF2-40B4-BE49-F238E27FC236}">
+                <a16:creationId xmlns:a16="http://schemas.microsoft.com/office/drawing/2014/main" id="{97ADC3C3-A146-4CD4-8E14-4D8B48417535}"/>
+              </a:ext>
+            </a:extLst>
+          </p:cNvPr>
+          <p:cNvSpPr>
+            <a:spLocks xmlns:a="http://schemas.openxmlformats.org/drawingml/2006/main" noGrp="1"/>
+          </p:cNvSpPr>
+          <p:nvPr/>
+        </p:nvSpPr>
+        <p:spPr>
+          <a:xfrm xmlns:a="http://schemas.openxmlformats.org/drawingml/2006/main">
+            <a:off x="609600" y="5953125"/>
+            <a:ext cx="10972800" cy="9525"/>
+          </a:xfrm>
+          <a:prstGeom xmlns:a="http://schemas.openxmlformats.org/drawingml/2006/main" prst="rect">
+            <a:avLst/>
+          </a:prstGeom>
+          <a:solidFill xmlns:a="http://schemas.openxmlformats.org/drawingml/2006/main">
+            <a:srgbClr val="A9BDB7"/>
+          </a:solidFill>
+          <a:ln xmlns:a="http://schemas.openxmlformats.org/drawingml/2006/main" w="0">
+            <a:noFill/>
+          </a:ln>
+        </p:spPr>
+      </p:sp>
+      <p:sp>
+        <p:nvSpPr>
+          <p:cNvPr id="17" name="">
+            <a:extLst xmlns:a="http://schemas.openxmlformats.org/drawingml/2006/main">
+              <a:ext uri="{FF2B5EF4-FFF2-40B4-BE49-F238E27FC236}">
+                <a16:creationId xmlns:a16="http://schemas.microsoft.com/office/drawing/2014/main" id="{50A1384C-24BA-42A2-B464-B1523A88F26B}"/>
+              </a:ext>
+            </a:extLst>
+          </p:cNvPr>
+          <p:cNvSpPr>
+            <a:spLocks xmlns:a="http://schemas.openxmlformats.org/drawingml/2006/main" noGrp="1"/>
+          </p:cNvSpPr>
+          <p:nvPr/>
+        </p:nvSpPr>
+        <p:spPr>
+          <a:xfrm xmlns:a="http://schemas.openxmlformats.org/drawingml/2006/main">
+            <a:off x="609600" y="6191250"/>
+            <a:ext cx="3238500" cy="361950"/>
+          </a:xfrm>
+          <a:prstGeom xmlns:a="http://schemas.openxmlformats.org/drawingml/2006/main" prst="rect">
+            <a:avLst/>
+          </a:prstGeom>
+          <a:noFill xmlns:a="http://schemas.openxmlformats.org/drawingml/2006/main"/>
+          <a:ln xmlns:a="http://schemas.openxmlformats.org/drawingml/2006/main" w="0">
+            <a:noFill/>
+          </a:ln>
+        </p:spPr>
+        <p:txBody>
+          <a:bodyPr xmlns:a="http://schemas.openxmlformats.org/drawingml/2006/main" lIns="0" tIns="0" rIns="0" bIns="0" anchor="t">
+            <a:noAutofit/>
+          </a:bodyPr>
+          <a:lstStyle xmlns:a="http://schemas.openxmlformats.org/drawingml/2006/main"/>
+          <a:p xmlns:a="http://schemas.openxmlformats.org/drawingml/2006/main">
+            <a:pPr>
+              <a:defRPr sz="1650" b="0">
+                <a:solidFill>
+                  <a:srgbClr val="687572"/>
+                </a:solidFill>
+                <a:latin typeface="DejaVu Sans"/>
+                <a:ea typeface="DejaVu Sans"/>
+                <a:cs typeface="DejaVu Sans"/>
+              </a:defRPr>
+            </a:pPr>
+            <a:r>
+              <a:rPr sz="1650" b="0">
+                <a:solidFill>
+                  <a:srgbClr val="687572"/>
+                </a:solidFill>
+                <a:latin typeface="DejaVu Sans"/>
+                <a:ea typeface="DejaVu Sans"/>
+                <a:cs typeface="DejaVu Sans"/>
+              </a:rPr>
+              <a:t>Time: [Minutes]</a:t>
+            </a:r>
+          </a:p>
+        </p:txBody>
+      </p:sp>
+      <p:sp>
+        <p:nvSpPr>
+          <p:cNvPr id="18" name="">
+            <a:extLst xmlns:a="http://schemas.openxmlformats.org/drawingml/2006/main">
+              <a:ext uri="{FF2B5EF4-FFF2-40B4-BE49-F238E27FC236}">
+                <a16:creationId xmlns:a16="http://schemas.microsoft.com/office/drawing/2014/main" id="{645C814F-8BA7-4048-95A6-5B833FB0DD56}"/>
+              </a:ext>
+            </a:extLst>
+          </p:cNvPr>
+          <p:cNvSpPr>
+            <a:spLocks xmlns:a="http://schemas.openxmlformats.org/drawingml/2006/main" noGrp="1"/>
+          </p:cNvSpPr>
+          <p:nvPr/>
+        </p:nvSpPr>
+        <p:spPr>
+          <a:xfrm xmlns:a="http://schemas.openxmlformats.org/drawingml/2006/main">
+            <a:off x="4286250" y="6191250"/>
+            <a:ext cx="7296150" cy="361950"/>
+          </a:xfrm>
+          <a:prstGeom xmlns:a="http://schemas.openxmlformats.org/drawingml/2006/main" prst="rect">
+            <a:avLst/>
+          </a:prstGeom>
+          <a:noFill xmlns:a="http://schemas.openxmlformats.org/drawingml/2006/main"/>
+          <a:ln xmlns:a="http://schemas.openxmlformats.org/drawingml/2006/main" w="0">
+            <a:noFill/>
+          </a:ln>
+        </p:spPr>
+        <p:txBody>
+          <a:bodyPr xmlns:a="http://schemas.openxmlformats.org/drawingml/2006/main" lIns="0" tIns="0" rIns="0" bIns="0" anchor="t">
+            <a:noAutofit/>
+          </a:bodyPr>
+          <a:lstStyle xmlns:a="http://schemas.openxmlformats.org/drawingml/2006/main"/>
+          <a:p xmlns:a="http://schemas.openxmlformats.org/drawingml/2006/main">
+            <a:pPr>
+              <a:defRPr sz="1650" b="0">
+                <a:solidFill>
+                  <a:srgbClr val="687572"/>
+                </a:solidFill>
+                <a:latin typeface="DejaVu Sans"/>
+                <a:ea typeface="DejaVu Sans"/>
+                <a:cs typeface="DejaVu Sans"/>
+              </a:defRPr>
+            </a:pPr>
+            <a:r>
+              <a:rPr sz="1650" b="0">
+                <a:solidFill>
+                  <a:srgbClr val="687572"/>
+                </a:solidFill>
+                <a:latin typeface="DejaVu Sans"/>
+                <a:ea typeface="DejaVu Sans"/>
+                <a:cs typeface="DejaVu Sans"/>
+              </a:rPr>
+              <a:t>Feedback: [Your checking routine]</a:t>
+            </a:r>
+          </a:p>
+        </p:txBody>
+      </p:sp>
     </p:spTree>
     <p:extLst>
       <p:ext uri="{BB962C8B-B14F-4D97-AF65-F5344CB8AC3E}">
-        <p14:creationId xmlns:p14="http://schemas.microsoft.com/office/powerpoint/2010/main" val="124326256"/>
+        <p14:creationId xmlns:p14="http://schemas.microsoft.com/office/powerpoint/2010/main" val="1042217326"/>
       </p:ext>
     </p:extLst>
   </p:cSld>
